--- a/slides/InterfaceDNA_Checkpoint1.pptx
+++ b/slides/InterfaceDNA_Checkpoint1.pptx
@@ -1342,7 +1342,7 @@
           <a:p>
             <a:fld id="{56D64244-A3D4-4B68-87F0-779EEA0C37FE}" type="datetime1">
               <a:rPr lang="en-US" smtClean="0"/>
-              <a:t>9/17/26</a:t>
+              <a:t>9/18/26</a:t>
             </a:fld>
             <a:endParaRPr lang="en-US"/>
           </a:p>
@@ -1671,7 +1671,7 @@
           <a:p>
             <a:fld id="{56D64244-A3D4-4B68-87F0-779EEA0C37FE}" type="datetime1">
               <a:rPr lang="en-US" smtClean="0"/>
-              <a:t>9/17/26</a:t>
+              <a:t>9/18/26</a:t>
             </a:fld>
             <a:endParaRPr lang="en-US"/>
           </a:p>
@@ -1934,7 +1934,7 @@
           <a:p>
             <a:fld id="{56D64244-A3D4-4B68-87F0-779EEA0C37FE}" type="datetime1">
               <a:rPr lang="en-US" smtClean="0"/>
-              <a:t>9/17/26</a:t>
+              <a:t>9/18/26</a:t>
             </a:fld>
             <a:endParaRPr lang="en-US"/>
           </a:p>
@@ -2203,7 +2203,7 @@
           <a:p>
             <a:fld id="{56D64244-A3D4-4B68-87F0-779EEA0C37FE}" type="datetime1">
               <a:rPr lang="en-US" smtClean="0"/>
-              <a:t>9/17/26</a:t>
+              <a:t>9/18/26</a:t>
             </a:fld>
             <a:endParaRPr lang="en-US"/>
           </a:p>
@@ -2477,7 +2477,7 @@
           <a:p>
             <a:fld id="{56D64244-A3D4-4B68-87F0-779EEA0C37FE}" type="datetime1">
               <a:rPr lang="en-US" smtClean="0"/>
-              <a:t>9/17/26</a:t>
+              <a:t>9/18/26</a:t>
             </a:fld>
             <a:endParaRPr lang="en-US"/>
           </a:p>
@@ -2758,7 +2758,7 @@
           <a:p>
             <a:fld id="{56D64244-A3D4-4B68-87F0-779EEA0C37FE}" type="datetime1">
               <a:rPr lang="en-US" smtClean="0"/>
-              <a:t>9/17/26</a:t>
+              <a:t>9/18/26</a:t>
             </a:fld>
             <a:endParaRPr lang="en-US"/>
           </a:p>
@@ -3126,7 +3126,7 @@
           <a:p>
             <a:fld id="{56D64244-A3D4-4B68-87F0-779EEA0C37FE}" type="datetime1">
               <a:rPr lang="en-US" smtClean="0"/>
-              <a:t>9/17/26</a:t>
+              <a:t>9/18/26</a:t>
             </a:fld>
             <a:endParaRPr lang="en-US"/>
           </a:p>
@@ -3425,7 +3425,7 @@
           <a:p>
             <a:fld id="{56D64244-A3D4-4B68-87F0-779EEA0C37FE}" type="datetime1">
               <a:rPr lang="en-US" smtClean="0"/>
-              <a:t>9/17/26</a:t>
+              <a:t>9/18/26</a:t>
             </a:fld>
             <a:endParaRPr lang="en-US"/>
           </a:p>
@@ -3704,7 +3704,7 @@
           <a:p>
             <a:fld id="{56D64244-A3D4-4B68-87F0-779EEA0C37FE}" type="datetime1">
               <a:rPr lang="en-US" smtClean="0"/>
-              <a:t>9/17/26</a:t>
+              <a:t>9/18/26</a:t>
             </a:fld>
             <a:endParaRPr lang="en-US"/>
           </a:p>
@@ -4035,7 +4035,7 @@
           <a:p>
             <a:fld id="{56D64244-A3D4-4B68-87F0-779EEA0C37FE}" type="datetime1">
               <a:rPr lang="en-US" smtClean="0"/>
-              <a:t>9/17/26</a:t>
+              <a:t>9/18/26</a:t>
             </a:fld>
             <a:endParaRPr lang="en-US"/>
           </a:p>
@@ -4341,7 +4341,7 @@
           <a:p>
             <a:fld id="{56D64244-A3D4-4B68-87F0-779EEA0C37FE}" type="datetime1">
               <a:rPr lang="en-US" smtClean="0"/>
-              <a:t>9/17/26</a:t>
+              <a:t>9/18/26</a:t>
             </a:fld>
             <a:endParaRPr lang="en-US"/>
           </a:p>
@@ -4617,7 +4617,7 @@
           <a:p>
             <a:fld id="{56D64244-A3D4-4B68-87F0-779EEA0C37FE}" type="datetime1">
               <a:rPr lang="en-US" smtClean="0"/>
-              <a:t>9/17/26</a:t>
+              <a:t>9/18/26</a:t>
             </a:fld>
             <a:endParaRPr lang="en-US"/>
           </a:p>
@@ -5020,7 +5020,7 @@
           <a:p>
             <a:fld id="{56D64244-A3D4-4B68-87F0-779EEA0C37FE}" type="datetime1">
               <a:rPr lang="en-US" smtClean="0"/>
-              <a:t>9/17/26</a:t>
+              <a:t>9/18/26</a:t>
             </a:fld>
             <a:endParaRPr lang="en-US"/>
           </a:p>
@@ -5466,7 +5466,7 @@
           <a:p>
             <a:fld id="{56D64244-A3D4-4B68-87F0-779EEA0C37FE}" type="datetime1">
               <a:rPr lang="en-US" smtClean="0"/>
-              <a:t>9/17/26</a:t>
+              <a:t>9/18/26</a:t>
             </a:fld>
             <a:endParaRPr lang="en-US"/>
           </a:p>
@@ -5760,7 +5760,7 @@
           <a:p>
             <a:fld id="{56D64244-A3D4-4B68-87F0-779EEA0C37FE}" type="datetime1">
               <a:rPr lang="en-US" smtClean="0"/>
-              <a:t>9/17/26</a:t>
+              <a:t>9/18/26</a:t>
             </a:fld>
             <a:endParaRPr lang="en-US"/>
           </a:p>
@@ -6184,7 +6184,7 @@
           <a:p>
             <a:fld id="{56D64244-A3D4-4B68-87F0-779EEA0C37FE}" type="datetime1">
               <a:rPr lang="en-US" smtClean="0"/>
-              <a:t>9/17/26</a:t>
+              <a:t>9/18/26</a:t>
             </a:fld>
             <a:endParaRPr lang="en-US"/>
           </a:p>
@@ -6337,7 +6337,7 @@
           <a:p>
             <a:fld id="{F1E57D35-FD3E-408B-A06E-7ED09E94C083}" type="datetime1">
               <a:rPr lang="en-US" smtClean="0"/>
-              <a:t>9/17/26</a:t>
+              <a:t>9/18/26</a:t>
             </a:fld>
             <a:endParaRPr lang="en-US" dirty="0"/>
           </a:p>
@@ -6454,7 +6454,7 @@
           <a:p>
             <a:fld id="{56D64244-A3D4-4B68-87F0-779EEA0C37FE}" type="datetime1">
               <a:rPr lang="en-US" smtClean="0"/>
-              <a:t>9/17/26</a:t>
+              <a:t>9/18/26</a:t>
             </a:fld>
             <a:endParaRPr lang="en-US"/>
           </a:p>
@@ -6866,7 +6866,7 @@
           <a:p>
             <a:fld id="{56D64244-A3D4-4B68-87F0-779EEA0C37FE}" type="datetime1">
               <a:rPr lang="en-US" smtClean="0"/>
-              <a:t>9/17/26</a:t>
+              <a:t>9/18/26</a:t>
             </a:fld>
             <a:endParaRPr lang="en-US"/>
           </a:p>
@@ -7319,7 +7319,7 @@
           <a:p>
             <a:fld id="{56D64244-A3D4-4B68-87F0-779EEA0C37FE}" type="datetime1">
               <a:rPr lang="en-US" smtClean="0"/>
-              <a:t>9/17/26</a:t>
+              <a:t>9/18/26</a:t>
             </a:fld>
             <a:endParaRPr lang="en-US"/>
           </a:p>
@@ -7773,7 +7773,7 @@
           <a:p>
             <a:fld id="{56D64244-A3D4-4B68-87F0-779EEA0C37FE}" type="datetime1">
               <a:rPr lang="en-US" smtClean="0"/>
-              <a:t>9/17/26</a:t>
+              <a:t>9/18/26</a:t>
             </a:fld>
             <a:endParaRPr lang="en-US"/>
           </a:p>
@@ -8144,7 +8144,7 @@
           <a:p>
             <a:fld id="{56D64244-A3D4-4B68-87F0-779EEA0C37FE}" type="datetime1">
               <a:rPr lang="en-US" smtClean="0"/>
-              <a:t>9/17/26</a:t>
+              <a:t>9/18/26</a:t>
             </a:fld>
             <a:endParaRPr lang="en-US"/>
           </a:p>
@@ -8446,7 +8446,7 @@
           <a:p>
             <a:fld id="{56D64244-A3D4-4B68-87F0-779EEA0C37FE}" type="datetime1">
               <a:rPr lang="en-US" smtClean="0"/>
-              <a:t>9/17/26</a:t>
+              <a:t>9/18/26</a:t>
             </a:fld>
             <a:endParaRPr lang="en-US"/>
           </a:p>
@@ -8921,7 +8921,7 @@
           <a:p>
             <a:fld id="{56D64244-A3D4-4B68-87F0-779EEA0C37FE}" type="datetime1">
               <a:rPr lang="en-US" smtClean="0"/>
-              <a:t>9/17/26</a:t>
+              <a:t>9/18/26</a:t>
             </a:fld>
             <a:endParaRPr lang="en-US"/>
           </a:p>
@@ -9389,7 +9389,7 @@
           <a:p>
             <a:fld id="{56D64244-A3D4-4B68-87F0-779EEA0C37FE}" type="datetime1">
               <a:rPr lang="en-US" smtClean="0"/>
-              <a:t>9/17/26</a:t>
+              <a:t>9/18/26</a:t>
             </a:fld>
             <a:endParaRPr lang="en-US"/>
           </a:p>
@@ -9663,7 +9663,7 @@
           <a:p>
             <a:fld id="{56D64244-A3D4-4B68-87F0-779EEA0C37FE}" type="datetime1">
               <a:rPr lang="en-US" smtClean="0"/>
-              <a:t>9/17/26</a:t>
+              <a:t>9/18/26</a:t>
             </a:fld>
             <a:endParaRPr lang="en-US"/>
           </a:p>
@@ -9886,7 +9886,7 @@
           <a:p>
             <a:fld id="{56D64244-A3D4-4B68-87F0-779EEA0C37FE}" type="datetime1">
               <a:rPr lang="en-US" smtClean="0"/>
-              <a:t>9/17/26</a:t>
+              <a:t>9/18/26</a:t>
             </a:fld>
             <a:endParaRPr lang="en-US"/>
           </a:p>
@@ -10204,7 +10204,7 @@
           <a:p>
             <a:fld id="{56D64244-A3D4-4B68-87F0-779EEA0C37FE}" type="datetime1">
               <a:rPr lang="en-US" smtClean="0"/>
-              <a:t>9/17/26</a:t>
+              <a:t>9/18/26</a:t>
             </a:fld>
             <a:endParaRPr lang="en-US"/>
           </a:p>
@@ -12510,7 +12510,7 @@
           <a:bodyPr/>
           <a:lstStyle/>
           <a:p>
-            <a:endParaRPr lang="en-US"/>
+            <a:endParaRPr lang="en-US" dirty="0"/>
           </a:p>
         </p:txBody>
       </p:sp>
@@ -13629,6 +13629,146 @@
               <a:t>InterfaceDNA  3</a:t>
             </a:r>
             <a:endParaRPr lang="en-US" sz="900" dirty="0"/>
+          </a:p>
+        </p:txBody>
+      </p:sp>
+      <p:sp>
+        <p:nvSpPr>
+          <p:cNvPr id="36" name="TextBox 35">
+            <a:extLst>
+              <a:ext uri="{FF2B5EF4-FFF2-40B4-BE49-F238E27FC236}">
+                <a16:creationId xmlns:a16="http://schemas.microsoft.com/office/drawing/2014/main" id="{F262C446-1DDB-7C09-31EA-3FA182DB821E}"/>
+              </a:ext>
+            </a:extLst>
+          </p:cNvPr>
+          <p:cNvSpPr txBox="1"/>
+          <p:nvPr/>
+        </p:nvSpPr>
+        <p:spPr>
+          <a:xfrm>
+            <a:off x="1234543" y="1658630"/>
+            <a:ext cx="685697" cy="261610"/>
+          </a:xfrm>
+          <a:prstGeom prst="rect">
+            <a:avLst/>
+          </a:prstGeom>
+          <a:noFill/>
+        </p:spPr>
+        <p:txBody>
+          <a:bodyPr wrap="square" rtlCol="0">
+            <a:spAutoFit/>
+          </a:bodyPr>
+          <a:lstStyle/>
+          <a:p>
+            <a:r>
+              <a:rPr lang="en-US" sz="1100" dirty="0"/>
+              <a:t>- Anisha</a:t>
+            </a:r>
+          </a:p>
+        </p:txBody>
+      </p:sp>
+      <p:sp>
+        <p:nvSpPr>
+          <p:cNvPr id="37" name="TextBox 36">
+            <a:extLst>
+              <a:ext uri="{FF2B5EF4-FFF2-40B4-BE49-F238E27FC236}">
+                <a16:creationId xmlns:a16="http://schemas.microsoft.com/office/drawing/2014/main" id="{45A3DF21-AC7B-DEEA-D9F9-0E4658E0E2B0}"/>
+              </a:ext>
+            </a:extLst>
+          </p:cNvPr>
+          <p:cNvSpPr txBox="1"/>
+          <p:nvPr/>
+        </p:nvSpPr>
+        <p:spPr>
+          <a:xfrm>
+            <a:off x="3304094" y="1637624"/>
+            <a:ext cx="685697" cy="261610"/>
+          </a:xfrm>
+          <a:prstGeom prst="rect">
+            <a:avLst/>
+          </a:prstGeom>
+          <a:noFill/>
+        </p:spPr>
+        <p:txBody>
+          <a:bodyPr wrap="square" rtlCol="0">
+            <a:spAutoFit/>
+          </a:bodyPr>
+          <a:lstStyle/>
+          <a:p>
+            <a:r>
+              <a:rPr lang="en-US" sz="1100" dirty="0"/>
+              <a:t>- Aabha</a:t>
+            </a:r>
+          </a:p>
+        </p:txBody>
+      </p:sp>
+      <p:sp>
+        <p:nvSpPr>
+          <p:cNvPr id="38" name="TextBox 37">
+            <a:extLst>
+              <a:ext uri="{FF2B5EF4-FFF2-40B4-BE49-F238E27FC236}">
+                <a16:creationId xmlns:a16="http://schemas.microsoft.com/office/drawing/2014/main" id="{9EEFA9C6-C81E-4554-7BDC-6298C12BC73C}"/>
+              </a:ext>
+            </a:extLst>
+          </p:cNvPr>
+          <p:cNvSpPr txBox="1"/>
+          <p:nvPr/>
+        </p:nvSpPr>
+        <p:spPr>
+          <a:xfrm>
+            <a:off x="5395011" y="1634490"/>
+            <a:ext cx="685697" cy="261610"/>
+          </a:xfrm>
+          <a:prstGeom prst="rect">
+            <a:avLst/>
+          </a:prstGeom>
+          <a:noFill/>
+        </p:spPr>
+        <p:txBody>
+          <a:bodyPr wrap="square" rtlCol="0">
+            <a:spAutoFit/>
+          </a:bodyPr>
+          <a:lstStyle/>
+          <a:p>
+            <a:r>
+              <a:rPr lang="en-US" sz="1100" dirty="0"/>
+              <a:t>- Aabha</a:t>
+            </a:r>
+          </a:p>
+        </p:txBody>
+      </p:sp>
+      <p:sp>
+        <p:nvSpPr>
+          <p:cNvPr id="39" name="TextBox 38">
+            <a:extLst>
+              <a:ext uri="{FF2B5EF4-FFF2-40B4-BE49-F238E27FC236}">
+                <a16:creationId xmlns:a16="http://schemas.microsoft.com/office/drawing/2014/main" id="{396AEB3D-4E2F-541D-04F0-D4247C59CD19}"/>
+              </a:ext>
+            </a:extLst>
+          </p:cNvPr>
+          <p:cNvSpPr txBox="1"/>
+          <p:nvPr/>
+        </p:nvSpPr>
+        <p:spPr>
+          <a:xfrm>
+            <a:off x="7578090" y="1645920"/>
+            <a:ext cx="685697" cy="261610"/>
+          </a:xfrm>
+          <a:prstGeom prst="rect">
+            <a:avLst/>
+          </a:prstGeom>
+          <a:noFill/>
+        </p:spPr>
+        <p:txBody>
+          <a:bodyPr wrap="square" rtlCol="0">
+            <a:spAutoFit/>
+          </a:bodyPr>
+          <a:lstStyle/>
+          <a:p>
+            <a:r>
+              <a:rPr lang="en-US" sz="1100" dirty="0"/>
+              <a:t>- Sakshi</a:t>
+            </a:r>
           </a:p>
         </p:txBody>
       </p:sp>
@@ -21216,21 +21356,6 @@
               </a:rPr>
               <a:t>Thank You!</a:t>
             </a:r>
-            <a:endParaRPr lang="en-US" sz="5400" b="0" cap="none" spc="0" dirty="0">
-              <a:ln w="0"/>
-              <a:solidFill>
-                <a:srgbClr val="002060"/>
-              </a:solidFill>
-              <a:effectLst>
-                <a:outerShdw blurRad="38100" dist="25400" dir="5400000" algn="ctr" rotWithShape="0">
-                  <a:srgbClr val="6E747A">
-                    <a:alpha val="43000"/>
-                  </a:srgbClr>
-                </a:outerShdw>
-              </a:effectLst>
-              <a:latin typeface="+mj-lt"/>
-              <a:cs typeface="Apple Chancery" panose="03020702040506060504" pitchFamily="66" charset="-79"/>
-            </a:endParaRPr>
           </a:p>
         </p:txBody>
       </p:sp>
